--- a/liveries/cu/template.pptx
+++ b/liveries/cu/template.pptx
@@ -3211,5 +3211,31 @@
   </a:themeElements>
   <a:objectDefaults/>
   <a:extraClrSchemeLst/>
+  <a:custClrLst>
+    <a:custClr name="Data 1 · Gold">
+      <a:srgbClr val="AD8E38"/>
+    </a:custClr>
+    <a:custClr name="Data 2 · Blue">
+      <a:srgbClr val="096FAE"/>
+    </a:custClr>
+    <a:custClr name="Data 3 · Brown">
+      <a:srgbClr val="7D4000"/>
+    </a:custClr>
+    <a:custClr name="Data 4 · Teal">
+      <a:srgbClr val="00A2AE"/>
+    </a:custClr>
+    <a:custClr name="Data 5 · Magenta">
+      <a:srgbClr val="7A3270"/>
+    </a:custClr>
+    <a:custClr name="Data 6 · Green">
+      <a:srgbClr val="6C7300"/>
+    </a:custClr>
+    <a:custClr name="Data 7 · Blue">
+      <a:srgbClr val="6382D3"/>
+    </a:custClr>
+    <a:custClr name="Data 8 · Teal">
+      <a:srgbClr val="007E67"/>
+    </a:custClr>
+  </a:custClrLst>
 </a:theme>
 </file>
--- a/liveries/cu/template.pptx
+++ b/liveries/cu/template.pptx
@@ -3218,23 +3218,23 @@
     <a:custClr name="Data 2 · Blue">
       <a:srgbClr val="096FAE"/>
     </a:custClr>
-    <a:custClr name="Data 3 · Brown">
-      <a:srgbClr val="7D4000"/>
+    <a:custClr name="Data 3 · Red">
+      <a:srgbClr val="9C3F29"/>
     </a:custClr>
     <a:custClr name="Data 4 · Teal">
       <a:srgbClr val="00A2AE"/>
     </a:custClr>
-    <a:custClr name="Data 5 · Magenta">
-      <a:srgbClr val="7A3270"/>
+    <a:custClr name="Data 5 · Blue">
+      <a:srgbClr val="334C98"/>
     </a:custClr>
-    <a:custClr name="Data 6 · Green">
-      <a:srgbClr val="6C7300"/>
+    <a:custClr name="Data 6 · Orange">
+      <a:srgbClr val="A86100"/>
     </a:custClr>
-    <a:custClr name="Data 7 · Blue">
-      <a:srgbClr val="6382D3"/>
+    <a:custClr name="Data 7 · Pink">
+      <a:srgbClr val="812F62"/>
     </a:custClr>
-    <a:custClr name="Data 8 · Teal">
-      <a:srgbClr val="007E67"/>
+    <a:custClr name="Data 8 · Pink">
+      <a:srgbClr val="BC5969"/>
     </a:custClr>
   </a:custClrLst>
 </a:theme>

--- a/liveries/cu/template.pptx
+++ b/liveries/cu/template.pptx
@@ -3215,26 +3215,26 @@
     <a:custClr name="Data 1 · Gold">
       <a:srgbClr val="AD8E38"/>
     </a:custClr>
-    <a:custClr name="Data 2 · Blue">
+    <a:custClr name="Data 2 · Red">
+      <a:srgbClr val="9C3F29"/>
+    </a:custClr>
+    <a:custClr name="Data 3 · Blue">
       <a:srgbClr val="096FAE"/>
     </a:custClr>
-    <a:custClr name="Data 3 · Red">
-      <a:srgbClr val="9C3F29"/>
+    <a:custClr name="Data 4 · Green">
+      <a:srgbClr val="7A9C51"/>
     </a:custClr>
-    <a:custClr name="Data 4 · Teal">
-      <a:srgbClr val="00A2AE"/>
+    <a:custClr name="Data 5 · Pink">
+      <a:srgbClr val="812F62"/>
     </a:custClr>
-    <a:custClr name="Data 5 · Blue">
+    <a:custClr name="Data 6 · Teal">
+      <a:srgbClr val="00A1B8"/>
+    </a:custClr>
+    <a:custClr name="Data 7 · Blue">
       <a:srgbClr val="334C98"/>
     </a:custClr>
-    <a:custClr name="Data 6 · Orange">
-      <a:srgbClr val="A86100"/>
-    </a:custClr>
-    <a:custClr name="Data 7 · Pink">
-      <a:srgbClr val="812F62"/>
-    </a:custClr>
-    <a:custClr name="Data 8 · Pink">
-      <a:srgbClr val="BC5969"/>
+    <a:custClr name="Data 8 · Teal">
+      <a:srgbClr val="008777"/>
     </a:custClr>
   </a:custClrLst>
 </a:theme>

--- a/liveries/cu/template.pptx
+++ b/liveries/cu/template.pptx
@@ -3215,26 +3215,26 @@
     <a:custClr name="Data 1 · Gold">
       <a:srgbClr val="AD8E38"/>
     </a:custClr>
-    <a:custClr name="Data 2 · Blue">
+    <a:custClr name="Data 2 · Red">
+      <a:srgbClr val="9C3F29"/>
+    </a:custClr>
+    <a:custClr name="Data 3 · Blue">
       <a:srgbClr val="096FAE"/>
     </a:custClr>
-    <a:custClr name="Data 3 · Brown">
-      <a:srgbClr val="7D4000"/>
+    <a:custClr name="Data 4 · Green">
+      <a:srgbClr val="7A9C51"/>
     </a:custClr>
-    <a:custClr name="Data 4 · Teal">
-      <a:srgbClr val="00A2AE"/>
+    <a:custClr name="Data 5 · Pink">
+      <a:srgbClr val="812F62"/>
     </a:custClr>
-    <a:custClr name="Data 5 · Magenta">
-      <a:srgbClr val="7A3270"/>
-    </a:custClr>
-    <a:custClr name="Data 6 · Green">
-      <a:srgbClr val="6C7300"/>
+    <a:custClr name="Data 6 · Teal">
+      <a:srgbClr val="00A1B8"/>
     </a:custClr>
     <a:custClr name="Data 7 · Blue">
-      <a:srgbClr val="6382D3"/>
+      <a:srgbClr val="334C98"/>
     </a:custClr>
     <a:custClr name="Data 8 · Teal">
-      <a:srgbClr val="007E67"/>
+      <a:srgbClr val="008777"/>
     </a:custClr>
   </a:custClrLst>
 </a:theme>

--- a/liveries/cu/template.pptx
+++ b/liveries/cu/template.pptx
@@ -2611,8 +2611,8 @@
         </p:nvSpPr>
         <p:spPr>
           <a:xfrm>
-            <a:off x="0" y="336042"/>
-            <a:ext cx="219456" cy="654253"/>
+            <a:off x="0" y="335356"/>
+            <a:ext cx="219456" cy="533552"/>
           </a:xfrm>
           <a:prstGeom prst="rect">
             <a:avLst/>
@@ -2660,8 +2660,8 @@
         </p:nvSpPr>
         <p:spPr>
           <a:xfrm>
-            <a:off x="731520" y="336042"/>
-            <a:ext cx="10728960" cy="654253"/>
+            <a:off x="731520" y="335356"/>
+            <a:ext cx="10728960" cy="533552"/>
           </a:xfrm>
           <a:prstGeom prst="rect">
             <a:avLst/>

--- a/liveries/cu/template.pptx
+++ b/liveries/cu/template.pptx
@@ -2639,11 +2639,9 @@
           <a:prstGeom prst="line">
             <a:avLst/>
           </a:prstGeom>
-          <a:ln w="9525">
+          <a:ln w="10973">
             <a:solidFill>
-              <a:schemeClr val="tx1">
-                <a:alpha val="30000"/>
-              </a:schemeClr>
+              <a:srgbClr val="AAA8A3"/>
             </a:solidFill>
           </a:ln>
         </p:spPr>

--- a/liveries/cu/template.pptx
+++ b/liveries/cu/template.pptx
@@ -115,7 +115,7 @@
                 <a:spcPts val="0"/>
               </a:spcBef>
               <a:buNone/>
-              <a:defRPr sz="2800" b="1" cap="all">
+              <a:defRPr sz="2800" b="1" cap="all" spc="224">
                 <a:solidFill>
                   <a:srgbClr val="000000"/>
                 </a:solidFill>
@@ -2349,7 +2349,7 @@
                 <a:spcPts val="0"/>
               </a:spcBef>
               <a:buNone/>
-              <a:defRPr sz="2800" b="1" cap="all">
+              <a:defRPr sz="2800" b="1" cap="all" spc="224">
                 <a:solidFill>
                   <a:srgbClr val="000000"/>
                 </a:solidFill>

--- a/liveries/cu/template.pptx
+++ b/liveries/cu/template.pptx
@@ -115,7 +115,7 @@
                 <a:spcPts val="0"/>
               </a:spcBef>
               <a:buNone/>
-              <a:defRPr sz="2800" b="1" cap="all">
+              <a:defRPr sz="2800" b="1" cap="all" spc="224">
                 <a:solidFill>
                   <a:srgbClr val="000000"/>
                 </a:solidFill>
@@ -2349,7 +2349,7 @@
                 <a:spcPts val="0"/>
               </a:spcBef>
               <a:buNone/>
-              <a:defRPr sz="2800" b="1" cap="all">
+              <a:defRPr sz="2800" b="1" cap="all" spc="224">
                 <a:solidFill>
                   <a:srgbClr val="000000"/>
                 </a:solidFill>
@@ -2611,8 +2611,8 @@
         </p:nvSpPr>
         <p:spPr>
           <a:xfrm>
-            <a:off x="0" y="336042"/>
-            <a:ext cx="219456" cy="654253"/>
+            <a:off x="0" y="335356"/>
+            <a:ext cx="219456" cy="533552"/>
           </a:xfrm>
           <a:prstGeom prst="rect">
             <a:avLst/>
@@ -2639,11 +2639,9 @@
           <a:prstGeom prst="line">
             <a:avLst/>
           </a:prstGeom>
-          <a:ln w="9525">
+          <a:ln w="10973">
             <a:solidFill>
-              <a:schemeClr val="tx1">
-                <a:alpha val="30000"/>
-              </a:schemeClr>
+              <a:srgbClr val="AAA8A3"/>
             </a:solidFill>
           </a:ln>
         </p:spPr>
@@ -2660,8 +2658,8 @@
         </p:nvSpPr>
         <p:spPr>
           <a:xfrm>
-            <a:off x="731520" y="336042"/>
-            <a:ext cx="10728960" cy="654253"/>
+            <a:off x="731520" y="335356"/>
+            <a:ext cx="10728960" cy="533552"/>
           </a:xfrm>
           <a:prstGeom prst="rect">
             <a:avLst/>
